--- a/Week05/CssSelectorsAndProperties.pptx
+++ b/Week05/CssSelectorsAndProperties.pptx
@@ -5538,7 +5538,7 @@
           <a:p>
             <a:fld id="{5958763E-B898-436D-883D-03711491D54A}" type="datetimeFigureOut">
               <a:rPr lang="en-US" smtClean="0"/>
-              <a:t>9/4/2024</a:t>
+              <a:t>8/27/2026</a:t>
             </a:fld>
             <a:endParaRPr lang="en-US"/>
           </a:p>
@@ -12186,48 +12186,13 @@
                   </a:extLst>
                 </a:hlinkClick>
               </a:rPr>
-              <a:t>https://jsfiddle.net/6bhvk7aL/</a:t>
+              <a:t>https://hytop.onrender.com/e/css-ruleset-example</a:t>
             </a:r>
             <a:endParaRPr lang="en-US" sz="2400" b="1" dirty="0">
               <a:solidFill>
                 <a:schemeClr val="bg1"/>
               </a:solidFill>
             </a:endParaRPr>
-          </a:p>
-          <a:p>
-            <a:pPr marL="42863" indent="0" algn="ctr">
-              <a:buNone/>
-            </a:pPr>
-            <a:r>
-              <a:rPr lang="en-US" sz="1800" b="1" i="1" dirty="0">
-                <a:solidFill>
-                  <a:schemeClr val="bg1">
-                    <a:lumMod val="95000"/>
-                  </a:schemeClr>
-                </a:solidFill>
-              </a:rPr>
-              <a:t>Note: </a:t>
-            </a:r>
-            <a:r>
-              <a:rPr lang="en-US" sz="1800" b="1" i="1" dirty="0" err="1">
-                <a:solidFill>
-                  <a:schemeClr val="bg1">
-                    <a:lumMod val="95000"/>
-                  </a:schemeClr>
-                </a:solidFill>
-              </a:rPr>
-              <a:t>jsfiddle</a:t>
-            </a:r>
-            <a:r>
-              <a:rPr lang="en-US" sz="1800" b="1" i="1" dirty="0">
-                <a:solidFill>
-                  <a:schemeClr val="bg1">
-                    <a:lumMod val="95000"/>
-                  </a:schemeClr>
-                </a:solidFill>
-              </a:rPr>
-              <a:t> auto-links CSS</a:t>
-            </a:r>
           </a:p>
         </p:txBody>
       </p:sp>
